--- a/chapter1/parts/part-03-dataset-formats/clip.pptx
+++ b/chapter1/parts/part-03-dataset-formats/clip.pptx
@@ -4257,10 +4257,12 @@
           </a:bodyPr>
           <a:lstStyle/>
           <a:p>
-            <a:pPr>
+            <a:pPr lvl="0" marL="457200" indent="-228600">
+              <a:buFont typeface="Calibri"/>
               <a:spcAft>
                 <a:spcPts val="1000"/>
               </a:spcAft>
+              <a:buSzPct val="100000"/>
               <a:buChar char="•"/>
               <a:lnSpc>
                 <a:spcPts val="2200"/>
@@ -4277,10 +4279,12 @@
             </a:r>
           </a:p>
           <a:p>
-            <a:pPr>
+            <a:pPr lvl="0" marL="457200" indent="-228600">
+              <a:buFont typeface="Calibri"/>
               <a:spcAft>
                 <a:spcPts val="1000"/>
               </a:spcAft>
+              <a:buSzPct val="100000"/>
               <a:buChar char="•"/>
               <a:lnSpc>
                 <a:spcPts val="2200"/>
@@ -4416,10 +4420,12 @@
           </a:bodyPr>
           <a:lstStyle/>
           <a:p>
-            <a:pPr>
+            <a:pPr lvl="0" marL="457200" indent="-228600">
+              <a:buFont typeface="Calibri"/>
               <a:spcAft>
                 <a:spcPts val="1000"/>
               </a:spcAft>
+              <a:buSzPct val="100000"/>
               <a:buChar char="•"/>
               <a:lnSpc>
                 <a:spcPts val="2200"/>
@@ -4436,10 +4442,12 @@
             </a:r>
           </a:p>
           <a:p>
-            <a:pPr>
+            <a:pPr lvl="0" marL="457200" indent="-228600">
+              <a:buFont typeface="Calibri"/>
               <a:spcAft>
                 <a:spcPts val="1000"/>
               </a:spcAft>
+              <a:buSzPct val="100000"/>
               <a:buChar char="•"/>
               <a:lnSpc>
                 <a:spcPts val="2200"/>
@@ -4575,10 +4583,12 @@
           </a:bodyPr>
           <a:lstStyle/>
           <a:p>
-            <a:pPr>
+            <a:pPr lvl="0" marL="457200" indent="-228600">
+              <a:buFont typeface="Calibri"/>
               <a:spcAft>
                 <a:spcPts val="1000"/>
               </a:spcAft>
+              <a:buSzPct val="100000"/>
               <a:buChar char="•"/>
               <a:lnSpc>
                 <a:spcPts val="2200"/>
@@ -4595,10 +4605,12 @@
             </a:r>
           </a:p>
           <a:p>
-            <a:pPr>
+            <a:pPr lvl="0" marL="457200" indent="-228600">
+              <a:buFont typeface="Calibri"/>
               <a:spcAft>
                 <a:spcPts val="1000"/>
               </a:spcAft>
+              <a:buSzPct val="100000"/>
               <a:buChar char="•"/>
               <a:lnSpc>
                 <a:spcPts val="2200"/>
@@ -4615,10 +4627,12 @@
             </a:r>
           </a:p>
           <a:p>
-            <a:pPr>
+            <a:pPr lvl="0" marL="457200" indent="-228600">
+              <a:buFont typeface="Calibri"/>
               <a:spcAft>
                 <a:spcPts val="1000"/>
               </a:spcAft>
+              <a:buSzPct val="100000"/>
               <a:buChar char="•"/>
               <a:lnSpc>
                 <a:spcPts val="2200"/>
@@ -4754,10 +4768,12 @@
           </a:bodyPr>
           <a:lstStyle/>
           <a:p>
-            <a:pPr>
+            <a:pPr lvl="0" marL="457200" indent="-228600">
+              <a:buFont typeface="Calibri"/>
               <a:spcAft>
                 <a:spcPts val="1000"/>
               </a:spcAft>
+              <a:buSzPct val="100000"/>
               <a:buChar char="•"/>
               <a:lnSpc>
                 <a:spcPts val="2200"/>
@@ -4774,10 +4790,12 @@
             </a:r>
           </a:p>
           <a:p>
-            <a:pPr>
+            <a:pPr lvl="0" marL="457200" indent="-228600">
+              <a:buFont typeface="Calibri"/>
               <a:spcAft>
                 <a:spcPts val="1000"/>
               </a:spcAft>
+              <a:buSzPct val="100000"/>
               <a:buChar char="•"/>
               <a:lnSpc>
                 <a:spcPts val="2200"/>
@@ -4794,10 +4812,12 @@
             </a:r>
           </a:p>
           <a:p>
-            <a:pPr>
+            <a:pPr lvl="0" marL="457200" indent="-228600">
+              <a:buFont typeface="Calibri"/>
               <a:spcAft>
                 <a:spcPts val="1000"/>
               </a:spcAft>
+              <a:buSzPct val="100000"/>
               <a:buChar char="•"/>
               <a:lnSpc>
                 <a:spcPts val="2200"/>
@@ -4933,10 +4953,12 @@
           </a:bodyPr>
           <a:lstStyle/>
           <a:p>
-            <a:pPr>
+            <a:pPr lvl="0" marL="457200" indent="-228600">
+              <a:buFont typeface="Calibri"/>
               <a:spcAft>
                 <a:spcPts val="1000"/>
               </a:spcAft>
+              <a:buSzPct val="100000"/>
               <a:buChar char="•"/>
               <a:lnSpc>
                 <a:spcPts val="2200"/>
@@ -4953,10 +4975,12 @@
             </a:r>
           </a:p>
           <a:p>
-            <a:pPr>
+            <a:pPr lvl="0" marL="457200" indent="-228600">
+              <a:buFont typeface="Calibri"/>
               <a:spcAft>
                 <a:spcPts val="1000"/>
               </a:spcAft>
+              <a:buSzPct val="100000"/>
               <a:buChar char="•"/>
               <a:lnSpc>
                 <a:spcPts val="2200"/>
@@ -4973,10 +4997,12 @@
             </a:r>
           </a:p>
           <a:p>
-            <a:pPr>
+            <a:pPr lvl="0" marL="457200" indent="-228600">
+              <a:buFont typeface="Calibri"/>
               <a:spcAft>
                 <a:spcPts val="1000"/>
               </a:spcAft>
+              <a:buSzPct val="100000"/>
               <a:buChar char="•"/>
               <a:lnSpc>
                 <a:spcPts val="2200"/>
@@ -4993,10 +5019,12 @@
             </a:r>
           </a:p>
           <a:p>
-            <a:pPr>
+            <a:pPr lvl="0" marL="457200" indent="-228600">
+              <a:buFont typeface="Calibri"/>
               <a:spcAft>
                 <a:spcPts val="1000"/>
               </a:spcAft>
+              <a:buSzPct val="100000"/>
               <a:buChar char="•"/>
               <a:lnSpc>
                 <a:spcPts val="2200"/>
@@ -5013,10 +5041,12 @@
             </a:r>
           </a:p>
           <a:p>
-            <a:pPr>
+            <a:pPr lvl="0" marL="457200" indent="-228600">
+              <a:buFont typeface="Calibri"/>
               <a:spcAft>
                 <a:spcPts val="1000"/>
               </a:spcAft>
+              <a:buSzPct val="100000"/>
               <a:buChar char="•"/>
               <a:lnSpc>
                 <a:spcPts val="2200"/>
@@ -5152,10 +5182,12 @@
           </a:bodyPr>
           <a:lstStyle/>
           <a:p>
-            <a:pPr>
+            <a:pPr lvl="0" marL="457200" indent="-228600">
+              <a:buFont typeface="Calibri"/>
               <a:spcAft>
                 <a:spcPts val="1000"/>
               </a:spcAft>
+              <a:buSzPct val="100000"/>
               <a:buChar char="•"/>
               <a:lnSpc>
                 <a:spcPts val="2200"/>
@@ -5172,10 +5204,12 @@
             </a:r>
           </a:p>
           <a:p>
-            <a:pPr>
+            <a:pPr lvl="0" marL="457200" indent="-228600">
+              <a:buFont typeface="Calibri"/>
               <a:spcAft>
                 <a:spcPts val="1000"/>
               </a:spcAft>
+              <a:buSzPct val="100000"/>
               <a:buChar char="•"/>
               <a:lnSpc>
                 <a:spcPts val="2200"/>
@@ -5192,10 +5226,12 @@
             </a:r>
           </a:p>
           <a:p>
-            <a:pPr>
+            <a:pPr lvl="0" marL="457200" indent="-228600">
+              <a:buFont typeface="Calibri"/>
               <a:spcAft>
                 <a:spcPts val="1000"/>
               </a:spcAft>
+              <a:buSzPct val="100000"/>
               <a:buChar char="•"/>
               <a:lnSpc>
                 <a:spcPts val="2200"/>
@@ -5212,10 +5248,12 @@
             </a:r>
           </a:p>
           <a:p>
-            <a:pPr>
+            <a:pPr lvl="0" marL="457200" indent="-228600">
+              <a:buFont typeface="Calibri"/>
               <a:spcAft>
                 <a:spcPts val="1000"/>
               </a:spcAft>
+              <a:buSzPct val="100000"/>
               <a:buChar char="•"/>
               <a:lnSpc>
                 <a:spcPts val="2200"/>
@@ -5232,10 +5270,12 @@
             </a:r>
           </a:p>
           <a:p>
-            <a:pPr>
+            <a:pPr lvl="0" marL="457200" indent="-228600">
+              <a:buFont typeface="Calibri"/>
               <a:spcAft>
                 <a:spcPts val="1000"/>
               </a:spcAft>
+              <a:buSzPct val="100000"/>
               <a:buChar char="•"/>
               <a:lnSpc>
                 <a:spcPts val="2200"/>
@@ -5815,10 +5855,12 @@
           </a:bodyPr>
           <a:lstStyle/>
           <a:p>
-            <a:pPr>
+            <a:pPr lvl="0" marL="457200" indent="-228600">
+              <a:buFont typeface="Calibri"/>
               <a:spcAft>
                 <a:spcPts val="1000"/>
               </a:spcAft>
+              <a:buSzPct val="100000"/>
               <a:buChar char="•"/>
               <a:lnSpc>
                 <a:spcPts val="2200"/>
@@ -5835,10 +5877,12 @@
             </a:r>
           </a:p>
           <a:p>
-            <a:pPr>
+            <a:pPr lvl="0" marL="457200" indent="-228600">
+              <a:buFont typeface="Calibri"/>
               <a:spcAft>
                 <a:spcPts val="1000"/>
               </a:spcAft>
+              <a:buSzPct val="100000"/>
               <a:buChar char="•"/>
               <a:lnSpc>
                 <a:spcPts val="2200"/>
@@ -5855,10 +5899,12 @@
             </a:r>
           </a:p>
           <a:p>
-            <a:pPr>
+            <a:pPr lvl="0" marL="457200" indent="-228600">
+              <a:buFont typeface="Calibri"/>
               <a:spcAft>
                 <a:spcPts val="1000"/>
               </a:spcAft>
+              <a:buSzPct val="100000"/>
               <a:buChar char="•"/>
               <a:lnSpc>
                 <a:spcPts val="2200"/>
@@ -5875,10 +5921,12 @@
             </a:r>
           </a:p>
           <a:p>
-            <a:pPr>
+            <a:pPr lvl="0" marL="457200" indent="-228600">
+              <a:buFont typeface="Calibri"/>
               <a:spcAft>
                 <a:spcPts val="1000"/>
               </a:spcAft>
+              <a:buSzPct val="100000"/>
               <a:buChar char="•"/>
               <a:lnSpc>
                 <a:spcPts val="2200"/>
@@ -5895,10 +5943,12 @@
             </a:r>
           </a:p>
           <a:p>
-            <a:pPr>
+            <a:pPr lvl="0" marL="457200" indent="-228600">
+              <a:buFont typeface="Calibri"/>
               <a:spcAft>
                 <a:spcPts val="1000"/>
               </a:spcAft>
+              <a:buSzPct val="100000"/>
               <a:buChar char="•"/>
               <a:lnSpc>
                 <a:spcPts val="2200"/>
@@ -6421,10 +6471,12 @@
           </a:bodyPr>
           <a:lstStyle/>
           <a:p>
-            <a:pPr>
+            <a:pPr lvl="0" marL="457200" indent="-228600">
+              <a:buFont typeface="Calibri"/>
               <a:spcAft>
                 <a:spcPts val="1000"/>
               </a:spcAft>
+              <a:buSzPct val="100000"/>
               <a:buChar char="•"/>
               <a:lnSpc>
                 <a:spcPts val="2200"/>
@@ -6441,10 +6493,12 @@
             </a:r>
           </a:p>
           <a:p>
-            <a:pPr>
+            <a:pPr lvl="0" marL="457200" indent="-228600">
+              <a:buFont typeface="Calibri"/>
               <a:spcAft>
                 <a:spcPts val="1000"/>
               </a:spcAft>
+              <a:buSzPct val="100000"/>
               <a:buChar char="•"/>
               <a:lnSpc>
                 <a:spcPts val="2200"/>
@@ -6461,10 +6515,12 @@
             </a:r>
           </a:p>
           <a:p>
-            <a:pPr>
+            <a:pPr lvl="0" marL="457200" indent="-228600">
+              <a:buFont typeface="Calibri"/>
               <a:spcAft>
                 <a:spcPts val="1000"/>
               </a:spcAft>
+              <a:buSzPct val="100000"/>
               <a:buChar char="•"/>
               <a:lnSpc>
                 <a:spcPts val="2200"/>
